--- a/6-G-6/11-week-11/3-Explanation/G6 - 11 - Explanation - Introduction to Web.pptx
+++ b/6-G-6/11-week-11/3-Explanation/G6 - 11 - Explanation - Introduction to Web.pptx
@@ -5,23 +5,26 @@
     <p:sldMasterId id="2147483648" r:id="rId1"/>
   </p:sldMasterIdLst>
   <p:notesMasterIdLst>
-    <p:notesMasterId r:id="rId6"/>
+    <p:notesMasterId r:id="rId9"/>
   </p:notesMasterIdLst>
   <p:sldIdLst>
     <p:sldId id="266" r:id="rId2"/>
     <p:sldId id="267" r:id="rId3"/>
     <p:sldId id="269" r:id="rId4"/>
-    <p:sldId id="268" r:id="rId5"/>
+    <p:sldId id="270" r:id="rId5"/>
+    <p:sldId id="271" r:id="rId6"/>
+    <p:sldId id="272" r:id="rId7"/>
+    <p:sldId id="268" r:id="rId8"/>
   </p:sldIdLst>
   <p:sldSz cx="14630400" cy="8229600"/>
   <p:notesSz cx="8229600" cy="14630400"/>
   <p:embeddedFontLst>
     <p:embeddedFont>
-      <p:font typeface="Raleway" pitchFamily="2" charset="0"/>
-      <p:regular r:id="rId7"/>
-      <p:bold r:id="rId8"/>
-      <p:italic r:id="rId9"/>
-      <p:boldItalic r:id="rId10"/>
+      <p:font typeface="Raleway" panose="020B0003030101060003" pitchFamily="34" charset="0"/>
+      <p:regular r:id="rId10"/>
+      <p:bold r:id="rId11"/>
+      <p:italic r:id="rId12"/>
+      <p:boldItalic r:id="rId13"/>
     </p:embeddedFont>
   </p:embeddedFontLst>
   <p:defaultTextStyle>
@@ -502,7 +505,7 @@
           <a:p>
             <a:fld id="{F33845DA-D979-41A5-B89D-FEBE56FFFCDA}" type="datetimeFigureOut">
               <a:rPr lang="ar-EG" smtClean="0"/>
-              <a:t>11/05/1447</a:t>
+              <a:t>13/05/1447</a:t>
             </a:fld>
             <a:endParaRPr lang="ar-EG"/>
           </a:p>
@@ -749,7 +752,7 @@
           <a:p>
             <a:fld id="{F33845DA-D979-41A5-B89D-FEBE56FFFCDA}" type="datetimeFigureOut">
               <a:rPr lang="ar-EG" smtClean="0"/>
-              <a:t>11/05/1447</a:t>
+              <a:t>13/05/1447</a:t>
             </a:fld>
             <a:endParaRPr lang="ar-EG"/>
           </a:p>
@@ -996,7 +999,7 @@
           <a:p>
             <a:fld id="{F33845DA-D979-41A5-B89D-FEBE56FFFCDA}" type="datetimeFigureOut">
               <a:rPr lang="ar-EG" smtClean="0"/>
-              <a:t>11/05/1447</a:t>
+              <a:t>13/05/1447</a:t>
             </a:fld>
             <a:endParaRPr lang="ar-EG"/>
           </a:p>
@@ -9701,7 +9704,7 @@
                 <a:ea typeface="Raleway" pitchFamily="34" charset="-122"/>
                 <a:cs typeface="Raleway" pitchFamily="34" charset="-120"/>
               </a:rPr>
-              <a:t>P</a:t>
+              <a:t>Introduction to Web</a:t>
             </a:r>
             <a:endParaRPr lang="ar-EG" sz="6480" dirty="0"/>
           </a:p>
@@ -9854,6 +9857,267 @@
 </file>
 
 <file path=ppt/slides/slide4.xml><?xml version="1.0" encoding="utf-8"?>
+<p:sld xmlns:a="http://schemas.openxmlformats.org/drawingml/2006/main" xmlns:r="http://schemas.openxmlformats.org/officeDocument/2006/relationships" xmlns:p="http://schemas.openxmlformats.org/presentationml/2006/main">
+  <p:cSld>
+    <p:spTree>
+      <p:nvGrpSpPr>
+        <p:cNvPr id="1" name=""/>
+        <p:cNvGrpSpPr/>
+        <p:nvPr/>
+      </p:nvGrpSpPr>
+      <p:grpSpPr>
+        <a:xfrm>
+          <a:off x="0" y="0"/>
+          <a:ext cx="0" cy="0"/>
+          <a:chOff x="0" y="0"/>
+          <a:chExt cx="0" cy="0"/>
+        </a:xfrm>
+      </p:grpSpPr>
+      <p:sp>
+        <p:nvSpPr>
+          <p:cNvPr id="2" name="عنوان 1">
+            <a:extLst>
+              <a:ext uri="{FF2B5EF4-FFF2-40B4-BE49-F238E27FC236}">
+                <a16:creationId xmlns:a16="http://schemas.microsoft.com/office/drawing/2014/main" id="{813A4FE5-28F7-064C-DF4D-E1D8B578AF8B}"/>
+              </a:ext>
+            </a:extLst>
+          </p:cNvPr>
+          <p:cNvSpPr>
+            <a:spLocks noGrp="1"/>
+          </p:cNvSpPr>
+          <p:nvPr>
+            <p:ph type="title"/>
+          </p:nvPr>
+        </p:nvSpPr>
+        <p:spPr>
+          <a:xfrm>
+            <a:off x="5981700" y="1104900"/>
+            <a:ext cx="8648700" cy="6172199"/>
+          </a:xfrm>
+        </p:spPr>
+        <p:txBody>
+          <a:bodyPr/>
+          <a:lstStyle/>
+          <a:p>
+            <a:pPr algn="ctr"/>
+            <a:r>
+              <a:rPr lang="en-US" sz="13800" b="1" dirty="0">
+                <a:solidFill>
+                  <a:schemeClr val="tx2"/>
+                </a:solidFill>
+              </a:rPr>
+              <a:t>What is World Wide Web? </a:t>
+            </a:r>
+          </a:p>
+        </p:txBody>
+      </p:sp>
+      <p:pic>
+        <p:nvPicPr>
+          <p:cNvPr id="5" name="صورة 4">
+            <a:extLst>
+              <a:ext uri="{FF2B5EF4-FFF2-40B4-BE49-F238E27FC236}">
+                <a16:creationId xmlns:a16="http://schemas.microsoft.com/office/drawing/2014/main" id="{AF71C60E-8F59-6B35-D27F-902CA075864B}"/>
+              </a:ext>
+            </a:extLst>
+          </p:cNvPr>
+          <p:cNvPicPr>
+            <a:picLocks noChangeAspect="1"/>
+          </p:cNvPicPr>
+          <p:nvPr/>
+        </p:nvPicPr>
+        <p:blipFill>
+          <a:blip r:embed="rId2"/>
+          <a:stretch>
+            <a:fillRect/>
+          </a:stretch>
+        </p:blipFill>
+        <p:spPr>
+          <a:xfrm>
+            <a:off x="685800" y="0"/>
+            <a:ext cx="5878286" cy="8229600"/>
+          </a:xfrm>
+          <a:prstGeom prst="rect">
+            <a:avLst/>
+          </a:prstGeom>
+        </p:spPr>
+      </p:pic>
+    </p:spTree>
+    <p:extLst>
+      <p:ext uri="{BB962C8B-B14F-4D97-AF65-F5344CB8AC3E}">
+        <p14:creationId xmlns:p14="http://schemas.microsoft.com/office/powerpoint/2010/main" val="1997658900"/>
+      </p:ext>
+    </p:extLst>
+  </p:cSld>
+  <p:clrMapOvr>
+    <a:masterClrMapping/>
+  </p:clrMapOvr>
+</p:sld>
+</file>
+
+<file path=ppt/slides/slide5.xml><?xml version="1.0" encoding="utf-8"?>
+<p:sld xmlns:a="http://schemas.openxmlformats.org/drawingml/2006/main" xmlns:r="http://schemas.openxmlformats.org/officeDocument/2006/relationships" xmlns:p="http://schemas.openxmlformats.org/presentationml/2006/main">
+  <p:cSld>
+    <p:spTree>
+      <p:nvGrpSpPr>
+        <p:cNvPr id="1" name=""/>
+        <p:cNvGrpSpPr/>
+        <p:nvPr/>
+      </p:nvGrpSpPr>
+      <p:grpSpPr>
+        <a:xfrm>
+          <a:off x="0" y="0"/>
+          <a:ext cx="0" cy="0"/>
+          <a:chOff x="0" y="0"/>
+          <a:chExt cx="0" cy="0"/>
+        </a:xfrm>
+      </p:grpSpPr>
+      <p:sp>
+        <p:nvSpPr>
+          <p:cNvPr id="2" name="عنوان 1">
+            <a:extLst>
+              <a:ext uri="{FF2B5EF4-FFF2-40B4-BE49-F238E27FC236}">
+                <a16:creationId xmlns:a16="http://schemas.microsoft.com/office/drawing/2014/main" id="{EFCC47A1-F00D-51B9-F1FB-6861AEE1E2E9}"/>
+              </a:ext>
+            </a:extLst>
+          </p:cNvPr>
+          <p:cNvSpPr>
+            <a:spLocks noGrp="1"/>
+          </p:cNvSpPr>
+          <p:nvPr>
+            <p:ph type="title"/>
+          </p:nvPr>
+        </p:nvSpPr>
+        <p:spPr>
+          <a:xfrm>
+            <a:off x="342900" y="838200"/>
+            <a:ext cx="13944600" cy="6477000"/>
+          </a:xfrm>
+        </p:spPr>
+        <p:txBody>
+          <a:bodyPr/>
+          <a:lstStyle/>
+          <a:p>
+            <a:pPr algn="ctr"/>
+            <a:r>
+              <a:rPr lang="en-US" sz="8000" dirty="0"/>
+              <a:t>The World Wide Web (WWW), commonly  known as the Web, is a system where digital information is identified and accessed over the Internet </a:t>
+            </a:r>
+          </a:p>
+        </p:txBody>
+      </p:sp>
+    </p:spTree>
+    <p:extLst>
+      <p:ext uri="{BB962C8B-B14F-4D97-AF65-F5344CB8AC3E}">
+        <p14:creationId xmlns:p14="http://schemas.microsoft.com/office/powerpoint/2010/main" val="2805525045"/>
+      </p:ext>
+    </p:extLst>
+  </p:cSld>
+  <p:clrMapOvr>
+    <a:masterClrMapping/>
+  </p:clrMapOvr>
+</p:sld>
+</file>
+
+<file path=ppt/slides/slide6.xml><?xml version="1.0" encoding="utf-8"?>
+<p:sld xmlns:a="http://schemas.openxmlformats.org/drawingml/2006/main" xmlns:r="http://schemas.openxmlformats.org/officeDocument/2006/relationships" xmlns:p="http://schemas.openxmlformats.org/presentationml/2006/main">
+  <p:cSld>
+    <p:spTree>
+      <p:nvGrpSpPr>
+        <p:cNvPr id="1" name=""/>
+        <p:cNvGrpSpPr/>
+        <p:nvPr/>
+      </p:nvGrpSpPr>
+      <p:grpSpPr>
+        <a:xfrm>
+          <a:off x="0" y="0"/>
+          <a:ext cx="0" cy="0"/>
+          <a:chOff x="0" y="0"/>
+          <a:chExt cx="0" cy="0"/>
+        </a:xfrm>
+      </p:grpSpPr>
+      <p:sp>
+        <p:nvSpPr>
+          <p:cNvPr id="2" name="عنوان 1">
+            <a:extLst>
+              <a:ext uri="{FF2B5EF4-FFF2-40B4-BE49-F238E27FC236}">
+                <a16:creationId xmlns:a16="http://schemas.microsoft.com/office/drawing/2014/main" id="{9D913689-EAF7-CBF9-ECA3-3F0F20D276D4}"/>
+              </a:ext>
+            </a:extLst>
+          </p:cNvPr>
+          <p:cNvSpPr>
+            <a:spLocks noGrp="1"/>
+          </p:cNvSpPr>
+          <p:nvPr>
+            <p:ph type="title"/>
+          </p:nvPr>
+        </p:nvSpPr>
+        <p:spPr>
+          <a:xfrm>
+            <a:off x="381000" y="331432"/>
+            <a:ext cx="5767448" cy="7566736"/>
+          </a:xfrm>
+        </p:spPr>
+        <p:txBody>
+          <a:bodyPr/>
+          <a:lstStyle/>
+          <a:p>
+            <a:r>
+              <a:rPr lang="en-US" sz="11500" b="1" dirty="0"/>
+              <a:t>How to start creating websites</a:t>
+            </a:r>
+            <a:r>
+              <a:rPr lang="ar-EG" sz="11500" b="1" dirty="0"/>
+              <a:t> </a:t>
+            </a:r>
+            <a:endParaRPr lang="en-US" sz="11500" b="1" dirty="0"/>
+          </a:p>
+        </p:txBody>
+      </p:sp>
+      <p:pic>
+        <p:nvPicPr>
+          <p:cNvPr id="5" name="صورة 4">
+            <a:extLst>
+              <a:ext uri="{FF2B5EF4-FFF2-40B4-BE49-F238E27FC236}">
+                <a16:creationId xmlns:a16="http://schemas.microsoft.com/office/drawing/2014/main" id="{517D1029-BEA4-8BAA-0974-4E8BC7244DEC}"/>
+              </a:ext>
+            </a:extLst>
+          </p:cNvPr>
+          <p:cNvPicPr>
+            <a:picLocks noChangeAspect="1"/>
+          </p:cNvPicPr>
+          <p:nvPr/>
+        </p:nvPicPr>
+        <p:blipFill>
+          <a:blip r:embed="rId2"/>
+          <a:srcRect l="14709" t="14167" r="21958" b="23333"/>
+          <a:stretch>
+            <a:fillRect/>
+          </a:stretch>
+        </p:blipFill>
+        <p:spPr>
+          <a:xfrm>
+            <a:off x="6505696" y="0"/>
+            <a:ext cx="8124704" cy="8229600"/>
+          </a:xfrm>
+          <a:prstGeom prst="rect">
+            <a:avLst/>
+          </a:prstGeom>
+        </p:spPr>
+      </p:pic>
+    </p:spTree>
+    <p:extLst>
+      <p:ext uri="{BB962C8B-B14F-4D97-AF65-F5344CB8AC3E}">
+        <p14:creationId xmlns:p14="http://schemas.microsoft.com/office/powerpoint/2010/main" val="1954394114"/>
+      </p:ext>
+    </p:extLst>
+  </p:cSld>
+  <p:clrMapOvr>
+    <a:masterClrMapping/>
+  </p:clrMapOvr>
+</p:sld>
+</file>
+
+<file path=ppt/slides/slide7.xml><?xml version="1.0" encoding="utf-8"?>
 <p:sld xmlns:a="http://schemas.openxmlformats.org/drawingml/2006/main" xmlns:r="http://schemas.openxmlformats.org/officeDocument/2006/relationships" xmlns:p="http://schemas.openxmlformats.org/presentationml/2006/main">
   <p:cSld>
     <p:bg>
